--- a/resources/slides/05_shared.pptx
+++ b/resources/slides/05_shared.pptx
@@ -225,7 +225,7 @@
           <a:p>
             <a:fld id="{F20419C9-BE9D-3840-A79D-E9F8180400ED}" type="datetimeFigureOut">
               <a:rPr lang="en-US" smtClean="0"/>
-              <a:t>9/14/26</a:t>
+              <a:t>9/25/26</a:t>
             </a:fld>
             <a:endParaRPr lang="en-US"/>
           </a:p>
@@ -829,9 +829,9 @@
           <a:bodyPr/>
           <a:lstStyle/>
           <a:p>
-            <a:fld id="{CC015439-64B1-CE4E-8D65-9A05746CEBEF}" type="datetimeFigureOut">
+            <a:fld id="{A5141708-2615-3244-89AE-E56430E9237D}" type="datetime1">
               <a:rPr lang="en-US" smtClean="0"/>
-              <a:t>9/14/26</a:t>
+              <a:t>9/25/26</a:t>
             </a:fld>
             <a:endParaRPr lang="en-US"/>
           </a:p>
@@ -858,7 +858,10 @@
           <a:bodyPr/>
           <a:lstStyle/>
           <a:p>
-            <a:endParaRPr lang="en-US"/>
+            <a:r>
+              <a:rPr lang="en-US"/>
+              <a:t>Copyright Peterson &amp; Davie, 2026</a:t>
+            </a:r>
           </a:p>
         </p:txBody>
       </p:sp>
@@ -1061,9 +1064,9 @@
           <a:bodyPr/>
           <a:lstStyle/>
           <a:p>
-            <a:fld id="{CC015439-64B1-CE4E-8D65-9A05746CEBEF}" type="datetimeFigureOut">
+            <a:fld id="{5B7B06D1-02FD-F54C-9BFB-4DD2BFF5B371}" type="datetime1">
               <a:rPr lang="en-US" smtClean="0"/>
-              <a:t>9/14/26</a:t>
+              <a:t>9/25/26</a:t>
             </a:fld>
             <a:endParaRPr lang="en-US"/>
           </a:p>
@@ -1090,7 +1093,10 @@
           <a:bodyPr/>
           <a:lstStyle/>
           <a:p>
-            <a:endParaRPr lang="en-US"/>
+            <a:r>
+              <a:rPr lang="en-US"/>
+              <a:t>Copyright Peterson &amp; Davie, 2026</a:t>
+            </a:r>
           </a:p>
         </p:txBody>
       </p:sp>
@@ -1311,9 +1317,9 @@
           <a:bodyPr/>
           <a:lstStyle/>
           <a:p>
-            <a:fld id="{CC015439-64B1-CE4E-8D65-9A05746CEBEF}" type="datetimeFigureOut">
+            <a:fld id="{970F846D-D34A-BF4C-BE1C-ADA99CF1F9C6}" type="datetime1">
               <a:rPr lang="en-US" smtClean="0"/>
-              <a:t>9/14/26</a:t>
+              <a:t>9/25/26</a:t>
             </a:fld>
             <a:endParaRPr lang="en-US"/>
           </a:p>
@@ -1340,7 +1346,10 @@
           <a:bodyPr/>
           <a:lstStyle/>
           <a:p>
-            <a:endParaRPr lang="en-US"/>
+            <a:r>
+              <a:rPr lang="en-US"/>
+              <a:t>Copyright Peterson &amp; Davie, 2026</a:t>
+            </a:r>
           </a:p>
         </p:txBody>
       </p:sp>
@@ -1576,9 +1585,9 @@
           <a:bodyPr/>
           <a:lstStyle/>
           <a:p>
-            <a:fld id="{CC015439-64B1-CE4E-8D65-9A05746CEBEF}" type="datetimeFigureOut">
+            <a:fld id="{05CEE2EA-BA17-5548-9EEE-4660F8E16FBA}" type="datetime1">
               <a:rPr lang="en-US" smtClean="0"/>
-              <a:t>9/14/26</a:t>
+              <a:t>9/25/26</a:t>
             </a:fld>
             <a:endParaRPr lang="en-US"/>
           </a:p>
@@ -1605,7 +1614,10 @@
           <a:bodyPr/>
           <a:lstStyle/>
           <a:p>
-            <a:endParaRPr lang="en-US"/>
+            <a:r>
+              <a:rPr lang="en-US"/>
+              <a:t>Copyright Peterson &amp; Davie, 2026</a:t>
+            </a:r>
           </a:p>
         </p:txBody>
       </p:sp>
@@ -1717,9 +1729,9 @@
           <a:bodyPr/>
           <a:lstStyle/>
           <a:p>
-            <a:fld id="{CC015439-64B1-CE4E-8D65-9A05746CEBEF}" type="datetimeFigureOut">
+            <a:fld id="{A4D50FD5-6E2D-D145-9EE3-5186BB7B67BC}" type="datetime1">
               <a:rPr lang="en-US" smtClean="0"/>
-              <a:t>9/14/26</a:t>
+              <a:t>9/25/26</a:t>
             </a:fld>
             <a:endParaRPr lang="en-US"/>
           </a:p>
@@ -1746,7 +1758,10 @@
           <a:bodyPr/>
           <a:lstStyle/>
           <a:p>
-            <a:endParaRPr lang="en-US"/>
+            <a:r>
+              <a:rPr lang="en-US"/>
+              <a:t>Copyright Peterson &amp; Davie, 2026</a:t>
+            </a:r>
           </a:p>
         </p:txBody>
       </p:sp>
@@ -1920,9 +1935,9 @@
             </a:lvl1pPr>
           </a:lstStyle>
           <a:p>
-            <a:fld id="{CC015439-64B1-CE4E-8D65-9A05746CEBEF}" type="datetimeFigureOut">
+            <a:fld id="{69320E43-982B-A247-A78B-0ECE0C5199AA}" type="datetime1">
               <a:rPr lang="en-US" smtClean="0"/>
-              <a:t>9/14/26</a:t>
+              <a:t>9/25/26</a:t>
             </a:fld>
             <a:endParaRPr lang="en-US"/>
           </a:p>
@@ -1967,7 +1982,10 @@
             </a:lvl1pPr>
           </a:lstStyle>
           <a:p>
-            <a:endParaRPr lang="en-US"/>
+            <a:r>
+              <a:rPr lang="en-US"/>
+              <a:t>Copyright Peterson &amp; Davie, 2026</a:t>
+            </a:r>
           </a:p>
         </p:txBody>
       </p:sp>
@@ -2123,6 +2141,7 @@
     <p:sldLayoutId id="2147483652" r:id="rId4"/>
     <p:sldLayoutId id="2147483654" r:id="rId5"/>
   </p:sldLayoutIdLst>
+  <p:hf sldNum="0" hdr="0" dt="0"/>
   <p:txStyles>
     <p:titleStyle>
       <a:lvl1pPr algn="l" defTabSz="914400" rtl="0" eaLnBrk="1" latinLnBrk="0" hangingPunct="1">
@@ -2468,6 +2487,34 @@
           </a:p>
         </p:txBody>
       </p:sp>
+      <p:sp>
+        <p:nvSpPr>
+          <p:cNvPr id="4" name="Footer Placeholder 3">
+            <a:extLst>
+              <a:ext uri="{FF2B5EF4-FFF2-40B4-BE49-F238E27FC236}">
+                <a16:creationId xmlns:a16="http://schemas.microsoft.com/office/drawing/2014/main" id="{5C55F33B-3689-85C1-F484-521B72BE10CE}"/>
+              </a:ext>
+            </a:extLst>
+          </p:cNvPr>
+          <p:cNvSpPr>
+            <a:spLocks noGrp="1"/>
+          </p:cNvSpPr>
+          <p:nvPr>
+            <p:ph type="ftr" sz="quarter" idx="11"/>
+          </p:nvPr>
+        </p:nvSpPr>
+        <p:spPr/>
+        <p:txBody>
+          <a:bodyPr/>
+          <a:lstStyle/>
+          <a:p>
+            <a:r>
+              <a:rPr lang="en-US"/>
+              <a:t>Copyright Peterson &amp; Davie, 2026</a:t>
+            </a:r>
+          </a:p>
+        </p:txBody>
+      </p:sp>
     </p:spTree>
   </p:cSld>
   <p:clrMapOvr>
@@ -2514,6 +2561,34 @@
           </a:p>
         </p:txBody>
       </p:sp>
+      <p:sp>
+        <p:nvSpPr>
+          <p:cNvPr id="3" name="Footer Placeholder 2">
+            <a:extLst>
+              <a:ext uri="{FF2B5EF4-FFF2-40B4-BE49-F238E27FC236}">
+                <a16:creationId xmlns:a16="http://schemas.microsoft.com/office/drawing/2014/main" id="{E82C1361-577A-B9E7-61D4-DD532112F4C1}"/>
+              </a:ext>
+            </a:extLst>
+          </p:cNvPr>
+          <p:cNvSpPr>
+            <a:spLocks noGrp="1"/>
+          </p:cNvSpPr>
+          <p:nvPr>
+            <p:ph type="ftr" sz="quarter" idx="11"/>
+          </p:nvPr>
+        </p:nvSpPr>
+        <p:spPr/>
+        <p:txBody>
+          <a:bodyPr/>
+          <a:lstStyle/>
+          <a:p>
+            <a:r>
+              <a:rPr lang="en-US"/>
+              <a:t>Copyright Peterson &amp; Davie, 2026</a:t>
+            </a:r>
+          </a:p>
+        </p:txBody>
+      </p:sp>
     </p:spTree>
   </p:cSld>
   <p:clrMapOvr>
@@ -2641,6 +2716,34 @@
             <a:r>
               <a:rPr lang="en-US" dirty="0"/>
               <a:t>Use CSMA/CA instead of CSMA/CD</a:t>
+            </a:r>
+          </a:p>
+        </p:txBody>
+      </p:sp>
+      <p:sp>
+        <p:nvSpPr>
+          <p:cNvPr id="4" name="Footer Placeholder 3">
+            <a:extLst>
+              <a:ext uri="{FF2B5EF4-FFF2-40B4-BE49-F238E27FC236}">
+                <a16:creationId xmlns:a16="http://schemas.microsoft.com/office/drawing/2014/main" id="{A55A2A4A-3C41-CDE0-1C80-2D7244EADCA0}"/>
+              </a:ext>
+            </a:extLst>
+          </p:cNvPr>
+          <p:cNvSpPr>
+            <a:spLocks noGrp="1"/>
+          </p:cNvSpPr>
+          <p:nvPr>
+            <p:ph type="ftr" sz="quarter" idx="11"/>
+          </p:nvPr>
+        </p:nvSpPr>
+        <p:spPr/>
+        <p:txBody>
+          <a:bodyPr/>
+          <a:lstStyle/>
+          <a:p>
+            <a:r>
+              <a:rPr lang="en-US"/>
+              <a:t>Copyright Peterson &amp; Davie, 2026</a:t>
             </a:r>
           </a:p>
         </p:txBody>
@@ -2836,6 +2939,34 @@
           </a:prstGeom>
         </p:spPr>
       </p:pic>
+      <p:sp>
+        <p:nvSpPr>
+          <p:cNvPr id="6" name="Footer Placeholder 5">
+            <a:extLst>
+              <a:ext uri="{FF2B5EF4-FFF2-40B4-BE49-F238E27FC236}">
+                <a16:creationId xmlns:a16="http://schemas.microsoft.com/office/drawing/2014/main" id="{1D2C1581-731C-08CF-E843-E2744B7076AB}"/>
+              </a:ext>
+            </a:extLst>
+          </p:cNvPr>
+          <p:cNvSpPr>
+            <a:spLocks noGrp="1"/>
+          </p:cNvSpPr>
+          <p:nvPr>
+            <p:ph type="ftr" sz="quarter" idx="11"/>
+          </p:nvPr>
+        </p:nvSpPr>
+        <p:spPr/>
+        <p:txBody>
+          <a:bodyPr/>
+          <a:lstStyle/>
+          <a:p>
+            <a:r>
+              <a:rPr lang="en-US"/>
+              <a:t>Copyright Peterson &amp; Davie, 2026</a:t>
+            </a:r>
+          </a:p>
+        </p:txBody>
+      </p:sp>
     </p:spTree>
   </p:cSld>
   <p:clrMapOvr>
@@ -3012,6 +3143,34 @@
               <a:t>-1]</a:t>
             </a:r>
             <a:endParaRPr lang="en-US" baseline="30000" dirty="0"/>
+          </a:p>
+        </p:txBody>
+      </p:sp>
+      <p:sp>
+        <p:nvSpPr>
+          <p:cNvPr id="4" name="Footer Placeholder 3">
+            <a:extLst>
+              <a:ext uri="{FF2B5EF4-FFF2-40B4-BE49-F238E27FC236}">
+                <a16:creationId xmlns:a16="http://schemas.microsoft.com/office/drawing/2014/main" id="{3FF01026-6A71-3ABE-7C94-785353563862}"/>
+              </a:ext>
+            </a:extLst>
+          </p:cNvPr>
+          <p:cNvSpPr>
+            <a:spLocks noGrp="1"/>
+          </p:cNvSpPr>
+          <p:nvPr>
+            <p:ph type="ftr" sz="quarter" idx="11"/>
+          </p:nvPr>
+        </p:nvSpPr>
+        <p:spPr/>
+        <p:txBody>
+          <a:bodyPr/>
+          <a:lstStyle/>
+          <a:p>
+            <a:r>
+              <a:rPr lang="en-US"/>
+              <a:t>Copyright Peterson &amp; Davie, 2026</a:t>
+            </a:r>
           </a:p>
         </p:txBody>
       </p:sp>
@@ -3201,6 +3360,34 @@
           </a:p>
         </p:txBody>
       </p:sp>
+      <p:sp>
+        <p:nvSpPr>
+          <p:cNvPr id="4" name="Footer Placeholder 3">
+            <a:extLst>
+              <a:ext uri="{FF2B5EF4-FFF2-40B4-BE49-F238E27FC236}">
+                <a16:creationId xmlns:a16="http://schemas.microsoft.com/office/drawing/2014/main" id="{0CEF1967-EC57-984C-02B8-75EADCBD0B6E}"/>
+              </a:ext>
+            </a:extLst>
+          </p:cNvPr>
+          <p:cNvSpPr>
+            <a:spLocks noGrp="1"/>
+          </p:cNvSpPr>
+          <p:nvPr>
+            <p:ph type="ftr" sz="quarter" idx="11"/>
+          </p:nvPr>
+        </p:nvSpPr>
+        <p:spPr/>
+        <p:txBody>
+          <a:bodyPr/>
+          <a:lstStyle/>
+          <a:p>
+            <a:r>
+              <a:rPr lang="en-US"/>
+              <a:t>Copyright Peterson &amp; Davie, 2026</a:t>
+            </a:r>
+          </a:p>
+        </p:txBody>
+      </p:sp>
     </p:spTree>
   </p:cSld>
   <p:clrMapOvr>
@@ -3360,6 +3547,34 @@
           </a:prstGeom>
         </p:spPr>
       </p:pic>
+      <p:sp>
+        <p:nvSpPr>
+          <p:cNvPr id="5" name="Footer Placeholder 4">
+            <a:extLst>
+              <a:ext uri="{FF2B5EF4-FFF2-40B4-BE49-F238E27FC236}">
+                <a16:creationId xmlns:a16="http://schemas.microsoft.com/office/drawing/2014/main" id="{4942A276-EB80-85DD-6BF1-84B30A6E1A97}"/>
+              </a:ext>
+            </a:extLst>
+          </p:cNvPr>
+          <p:cNvSpPr>
+            <a:spLocks noGrp="1"/>
+          </p:cNvSpPr>
+          <p:nvPr>
+            <p:ph type="ftr" sz="quarter" idx="11"/>
+          </p:nvPr>
+        </p:nvSpPr>
+        <p:spPr/>
+        <p:txBody>
+          <a:bodyPr/>
+          <a:lstStyle/>
+          <a:p>
+            <a:r>
+              <a:rPr lang="en-US"/>
+              <a:t>Copyright Peterson &amp; Davie, 2026</a:t>
+            </a:r>
+          </a:p>
+        </p:txBody>
+      </p:sp>
     </p:spTree>
   </p:cSld>
   <p:clrMapOvr>
@@ -3507,6 +3722,34 @@
           </a:prstGeom>
         </p:spPr>
       </p:pic>
+      <p:sp>
+        <p:nvSpPr>
+          <p:cNvPr id="5" name="Footer Placeholder 4">
+            <a:extLst>
+              <a:ext uri="{FF2B5EF4-FFF2-40B4-BE49-F238E27FC236}">
+                <a16:creationId xmlns:a16="http://schemas.microsoft.com/office/drawing/2014/main" id="{DB8F17DF-E4AA-1A25-1B5F-4AD16B85BD91}"/>
+              </a:ext>
+            </a:extLst>
+          </p:cNvPr>
+          <p:cNvSpPr>
+            <a:spLocks noGrp="1"/>
+          </p:cNvSpPr>
+          <p:nvPr>
+            <p:ph type="ftr" sz="quarter" idx="11"/>
+          </p:nvPr>
+        </p:nvSpPr>
+        <p:spPr/>
+        <p:txBody>
+          <a:bodyPr/>
+          <a:lstStyle/>
+          <a:p>
+            <a:r>
+              <a:rPr lang="en-US"/>
+              <a:t>Copyright Peterson &amp; Davie, 2026</a:t>
+            </a:r>
+          </a:p>
+        </p:txBody>
+      </p:sp>
     </p:spTree>
   </p:cSld>
   <p:clrMapOvr>
@@ -3640,6 +3883,34 @@
           </a:prstGeom>
         </p:spPr>
       </p:pic>
+      <p:sp>
+        <p:nvSpPr>
+          <p:cNvPr id="5" name="Footer Placeholder 4">
+            <a:extLst>
+              <a:ext uri="{FF2B5EF4-FFF2-40B4-BE49-F238E27FC236}">
+                <a16:creationId xmlns:a16="http://schemas.microsoft.com/office/drawing/2014/main" id="{A3E1FBD8-0994-18D8-DDAA-41D960329995}"/>
+              </a:ext>
+            </a:extLst>
+          </p:cNvPr>
+          <p:cNvSpPr>
+            <a:spLocks noGrp="1"/>
+          </p:cNvSpPr>
+          <p:nvPr>
+            <p:ph type="ftr" sz="quarter" idx="11"/>
+          </p:nvPr>
+        </p:nvSpPr>
+        <p:spPr/>
+        <p:txBody>
+          <a:bodyPr/>
+          <a:lstStyle/>
+          <a:p>
+            <a:r>
+              <a:rPr lang="en-US"/>
+              <a:t>Copyright Peterson &amp; Davie, 2026</a:t>
+            </a:r>
+          </a:p>
+        </p:txBody>
+      </p:sp>
     </p:spTree>
   </p:cSld>
   <p:clrMapOvr>
@@ -3686,6 +3957,34 @@
           </a:p>
         </p:txBody>
       </p:sp>
+      <p:sp>
+        <p:nvSpPr>
+          <p:cNvPr id="3" name="Footer Placeholder 2">
+            <a:extLst>
+              <a:ext uri="{FF2B5EF4-FFF2-40B4-BE49-F238E27FC236}">
+                <a16:creationId xmlns:a16="http://schemas.microsoft.com/office/drawing/2014/main" id="{F24B23D7-EE68-BD99-4D46-97C7E795D2D0}"/>
+              </a:ext>
+            </a:extLst>
+          </p:cNvPr>
+          <p:cNvSpPr>
+            <a:spLocks noGrp="1"/>
+          </p:cNvSpPr>
+          <p:nvPr>
+            <p:ph type="ftr" sz="quarter" idx="11"/>
+          </p:nvPr>
+        </p:nvSpPr>
+        <p:spPr/>
+        <p:txBody>
+          <a:bodyPr/>
+          <a:lstStyle/>
+          <a:p>
+            <a:r>
+              <a:rPr lang="en-US"/>
+              <a:t>Copyright Peterson &amp; Davie, 2026</a:t>
+            </a:r>
+          </a:p>
+        </p:txBody>
+      </p:sp>
     </p:spTree>
   </p:cSld>
   <p:clrMapOvr>
@@ -3947,6 +4246,34 @@
           </a:p>
         </p:txBody>
       </p:sp>
+      <p:sp>
+        <p:nvSpPr>
+          <p:cNvPr id="5" name="Footer Placeholder 4">
+            <a:extLst>
+              <a:ext uri="{FF2B5EF4-FFF2-40B4-BE49-F238E27FC236}">
+                <a16:creationId xmlns:a16="http://schemas.microsoft.com/office/drawing/2014/main" id="{2DA97C85-A6DE-947E-00F4-04196D2E54A7}"/>
+              </a:ext>
+            </a:extLst>
+          </p:cNvPr>
+          <p:cNvSpPr>
+            <a:spLocks noGrp="1"/>
+          </p:cNvSpPr>
+          <p:nvPr>
+            <p:ph type="ftr" sz="quarter" idx="11"/>
+          </p:nvPr>
+        </p:nvSpPr>
+        <p:spPr/>
+        <p:txBody>
+          <a:bodyPr/>
+          <a:lstStyle/>
+          <a:p>
+            <a:r>
+              <a:rPr lang="en-US"/>
+              <a:t>Copyright Peterson &amp; Davie, 2026</a:t>
+            </a:r>
+          </a:p>
+        </p:txBody>
+      </p:sp>
     </p:spTree>
   </p:cSld>
   <p:clrMapOvr>
@@ -4038,6 +4365,34 @@
           </a:p>
         </p:txBody>
       </p:sp>
+      <p:sp>
+        <p:nvSpPr>
+          <p:cNvPr id="4" name="Footer Placeholder 3">
+            <a:extLst>
+              <a:ext uri="{FF2B5EF4-FFF2-40B4-BE49-F238E27FC236}">
+                <a16:creationId xmlns:a16="http://schemas.microsoft.com/office/drawing/2014/main" id="{BF24A231-F3A3-C083-2D65-73848CF66122}"/>
+              </a:ext>
+            </a:extLst>
+          </p:cNvPr>
+          <p:cNvSpPr>
+            <a:spLocks noGrp="1"/>
+          </p:cNvSpPr>
+          <p:nvPr>
+            <p:ph type="ftr" sz="quarter" idx="11"/>
+          </p:nvPr>
+        </p:nvSpPr>
+        <p:spPr/>
+        <p:txBody>
+          <a:bodyPr/>
+          <a:lstStyle/>
+          <a:p>
+            <a:r>
+              <a:rPr lang="en-US"/>
+              <a:t>Copyright Peterson &amp; Davie, 2026</a:t>
+            </a:r>
+          </a:p>
+        </p:txBody>
+      </p:sp>
     </p:spTree>
   </p:cSld>
   <p:clrMapOvr>
@@ -4151,6 +4506,34 @@
           </a:prstGeom>
         </p:spPr>
       </p:pic>
+      <p:sp>
+        <p:nvSpPr>
+          <p:cNvPr id="5" name="Footer Placeholder 4">
+            <a:extLst>
+              <a:ext uri="{FF2B5EF4-FFF2-40B4-BE49-F238E27FC236}">
+                <a16:creationId xmlns:a16="http://schemas.microsoft.com/office/drawing/2014/main" id="{32BDFC65-88F1-CAB4-EFCB-DB62EB7838BF}"/>
+              </a:ext>
+            </a:extLst>
+          </p:cNvPr>
+          <p:cNvSpPr>
+            <a:spLocks noGrp="1"/>
+          </p:cNvSpPr>
+          <p:nvPr>
+            <p:ph type="ftr" sz="quarter" idx="11"/>
+          </p:nvPr>
+        </p:nvSpPr>
+        <p:spPr/>
+        <p:txBody>
+          <a:bodyPr/>
+          <a:lstStyle/>
+          <a:p>
+            <a:r>
+              <a:rPr lang="en-US"/>
+              <a:t>Copyright Peterson &amp; Davie, 2026</a:t>
+            </a:r>
+          </a:p>
+        </p:txBody>
+      </p:sp>
     </p:spTree>
   </p:cSld>
   <p:clrMapOvr>
@@ -4287,6 +4670,34 @@
           </a:prstGeom>
         </p:spPr>
       </p:pic>
+      <p:sp>
+        <p:nvSpPr>
+          <p:cNvPr id="5" name="Footer Placeholder 4">
+            <a:extLst>
+              <a:ext uri="{FF2B5EF4-FFF2-40B4-BE49-F238E27FC236}">
+                <a16:creationId xmlns:a16="http://schemas.microsoft.com/office/drawing/2014/main" id="{528B6890-775A-734F-DD29-3467811F6279}"/>
+              </a:ext>
+            </a:extLst>
+          </p:cNvPr>
+          <p:cNvSpPr>
+            <a:spLocks noGrp="1"/>
+          </p:cNvSpPr>
+          <p:nvPr>
+            <p:ph type="ftr" sz="quarter" idx="11"/>
+          </p:nvPr>
+        </p:nvSpPr>
+        <p:spPr/>
+        <p:txBody>
+          <a:bodyPr/>
+          <a:lstStyle/>
+          <a:p>
+            <a:r>
+              <a:rPr lang="en-US"/>
+              <a:t>Copyright Peterson &amp; Davie, 2026</a:t>
+            </a:r>
+          </a:p>
+        </p:txBody>
+      </p:sp>
     </p:spTree>
   </p:cSld>
   <p:clrMapOvr>
@@ -4634,6 +5045,34 @@
           </a:prstGeom>
         </p:spPr>
       </p:pic>
+      <p:sp>
+        <p:nvSpPr>
+          <p:cNvPr id="7" name="Footer Placeholder 6">
+            <a:extLst>
+              <a:ext uri="{FF2B5EF4-FFF2-40B4-BE49-F238E27FC236}">
+                <a16:creationId xmlns:a16="http://schemas.microsoft.com/office/drawing/2014/main" id="{3C283FD4-17E6-AE54-2D15-7B66D72EE3B7}"/>
+              </a:ext>
+            </a:extLst>
+          </p:cNvPr>
+          <p:cNvSpPr>
+            <a:spLocks noGrp="1"/>
+          </p:cNvSpPr>
+          <p:nvPr>
+            <p:ph type="ftr" sz="quarter" idx="11"/>
+          </p:nvPr>
+        </p:nvSpPr>
+        <p:spPr/>
+        <p:txBody>
+          <a:bodyPr/>
+          <a:lstStyle/>
+          <a:p>
+            <a:r>
+              <a:rPr lang="en-US"/>
+              <a:t>Copyright Peterson &amp; Davie, 2026</a:t>
+            </a:r>
+          </a:p>
+        </p:txBody>
+      </p:sp>
     </p:spTree>
   </p:cSld>
   <p:clrMapOvr>
@@ -4802,6 +5241,34 @@
               <a:t> to new Core</a:t>
             </a:r>
             <a:endParaRPr sz="2000" dirty="0"/>
+          </a:p>
+        </p:txBody>
+      </p:sp>
+      <p:sp>
+        <p:nvSpPr>
+          <p:cNvPr id="5" name="Footer Placeholder 4">
+            <a:extLst>
+              <a:ext uri="{FF2B5EF4-FFF2-40B4-BE49-F238E27FC236}">
+                <a16:creationId xmlns:a16="http://schemas.microsoft.com/office/drawing/2014/main" id="{7775B304-371F-BA63-800B-36D77C18C62D}"/>
+              </a:ext>
+            </a:extLst>
+          </p:cNvPr>
+          <p:cNvSpPr>
+            <a:spLocks noGrp="1"/>
+          </p:cNvSpPr>
+          <p:nvPr>
+            <p:ph type="ftr" sz="quarter" idx="11"/>
+          </p:nvPr>
+        </p:nvSpPr>
+        <p:spPr/>
+        <p:txBody>
+          <a:bodyPr/>
+          <a:lstStyle/>
+          <a:p>
+            <a:r>
+              <a:rPr lang="en-US"/>
+              <a:t>Copyright Peterson &amp; Davie, 2026</a:t>
+            </a:r>
           </a:p>
         </p:txBody>
       </p:sp>
@@ -5167,6 +5634,34 @@
           </a:prstGeom>
         </p:spPr>
       </p:pic>
+      <p:sp>
+        <p:nvSpPr>
+          <p:cNvPr id="7" name="Footer Placeholder 6">
+            <a:extLst>
+              <a:ext uri="{FF2B5EF4-FFF2-40B4-BE49-F238E27FC236}">
+                <a16:creationId xmlns:a16="http://schemas.microsoft.com/office/drawing/2014/main" id="{78C9832A-0FB3-300E-4568-C5B9D5E51829}"/>
+              </a:ext>
+            </a:extLst>
+          </p:cNvPr>
+          <p:cNvSpPr>
+            <a:spLocks noGrp="1"/>
+          </p:cNvSpPr>
+          <p:nvPr>
+            <p:ph type="ftr" sz="quarter" idx="11"/>
+          </p:nvPr>
+        </p:nvSpPr>
+        <p:spPr/>
+        <p:txBody>
+          <a:bodyPr/>
+          <a:lstStyle/>
+          <a:p>
+            <a:r>
+              <a:rPr lang="en-US"/>
+              <a:t>Copyright Peterson &amp; Davie, 2026</a:t>
+            </a:r>
+          </a:p>
+        </p:txBody>
+      </p:sp>
     </p:spTree>
   </p:cSld>
   <p:clrMapOvr>
@@ -5514,6 +6009,34 @@
           </a:prstGeom>
         </p:spPr>
       </p:pic>
+      <p:sp>
+        <p:nvSpPr>
+          <p:cNvPr id="5" name="Footer Placeholder 4">
+            <a:extLst>
+              <a:ext uri="{FF2B5EF4-FFF2-40B4-BE49-F238E27FC236}">
+                <a16:creationId xmlns:a16="http://schemas.microsoft.com/office/drawing/2014/main" id="{37F6BD10-D2F4-873F-AF23-E909F3B03525}"/>
+              </a:ext>
+            </a:extLst>
+          </p:cNvPr>
+          <p:cNvSpPr>
+            <a:spLocks noGrp="1"/>
+          </p:cNvSpPr>
+          <p:nvPr>
+            <p:ph type="ftr" sz="quarter" idx="11"/>
+          </p:nvPr>
+        </p:nvSpPr>
+        <p:spPr/>
+        <p:txBody>
+          <a:bodyPr/>
+          <a:lstStyle/>
+          <a:p>
+            <a:r>
+              <a:rPr lang="en-US"/>
+              <a:t>Copyright Peterson &amp; Davie, 2026</a:t>
+            </a:r>
+          </a:p>
+        </p:txBody>
+      </p:sp>
     </p:spTree>
   </p:cSld>
   <p:clrMapOvr>
@@ -5701,6 +6224,34 @@
           </a:prstGeom>
         </p:spPr>
       </p:pic>
+      <p:sp>
+        <p:nvSpPr>
+          <p:cNvPr id="5" name="Footer Placeholder 4">
+            <a:extLst>
+              <a:ext uri="{FF2B5EF4-FFF2-40B4-BE49-F238E27FC236}">
+                <a16:creationId xmlns:a16="http://schemas.microsoft.com/office/drawing/2014/main" id="{98AA35F9-6E0B-CBF9-B586-DF69B4287674}"/>
+              </a:ext>
+            </a:extLst>
+          </p:cNvPr>
+          <p:cNvSpPr>
+            <a:spLocks noGrp="1"/>
+          </p:cNvSpPr>
+          <p:nvPr>
+            <p:ph type="ftr" sz="quarter" idx="11"/>
+          </p:nvPr>
+        </p:nvSpPr>
+        <p:spPr/>
+        <p:txBody>
+          <a:bodyPr/>
+          <a:lstStyle/>
+          <a:p>
+            <a:r>
+              <a:rPr lang="en-US"/>
+              <a:t>Copyright Peterson &amp; Davie, 2026</a:t>
+            </a:r>
+          </a:p>
+        </p:txBody>
+      </p:sp>
     </p:spTree>
   </p:cSld>
   <p:clrMapOvr>
@@ -5747,6 +6298,34 @@
           </a:p>
         </p:txBody>
       </p:sp>
+      <p:sp>
+        <p:nvSpPr>
+          <p:cNvPr id="3" name="Footer Placeholder 2">
+            <a:extLst>
+              <a:ext uri="{FF2B5EF4-FFF2-40B4-BE49-F238E27FC236}">
+                <a16:creationId xmlns:a16="http://schemas.microsoft.com/office/drawing/2014/main" id="{C510A869-9C18-8B5A-B5D8-BDC475DD3E18}"/>
+              </a:ext>
+            </a:extLst>
+          </p:cNvPr>
+          <p:cNvSpPr>
+            <a:spLocks noGrp="1"/>
+          </p:cNvSpPr>
+          <p:nvPr>
+            <p:ph type="ftr" sz="quarter" idx="11"/>
+          </p:nvPr>
+        </p:nvSpPr>
+        <p:spPr/>
+        <p:txBody>
+          <a:bodyPr/>
+          <a:lstStyle/>
+          <a:p>
+            <a:r>
+              <a:rPr lang="en-US"/>
+              <a:t>Copyright Peterson &amp; Davie, 2026</a:t>
+            </a:r>
+          </a:p>
+        </p:txBody>
+      </p:sp>
     </p:spTree>
   </p:cSld>
   <p:clrMapOvr>
@@ -5864,6 +6443,34 @@
           </a:prstGeom>
         </p:spPr>
       </p:pic>
+      <p:sp>
+        <p:nvSpPr>
+          <p:cNvPr id="5" name="Footer Placeholder 4">
+            <a:extLst>
+              <a:ext uri="{FF2B5EF4-FFF2-40B4-BE49-F238E27FC236}">
+                <a16:creationId xmlns:a16="http://schemas.microsoft.com/office/drawing/2014/main" id="{BDF56EAF-170D-87C4-4906-459005FF0AFF}"/>
+              </a:ext>
+            </a:extLst>
+          </p:cNvPr>
+          <p:cNvSpPr>
+            <a:spLocks noGrp="1"/>
+          </p:cNvSpPr>
+          <p:nvPr>
+            <p:ph type="ftr" sz="quarter" idx="11"/>
+          </p:nvPr>
+        </p:nvSpPr>
+        <p:spPr/>
+        <p:txBody>
+          <a:bodyPr/>
+          <a:lstStyle/>
+          <a:p>
+            <a:r>
+              <a:rPr lang="en-US"/>
+              <a:t>Copyright Peterson &amp; Davie, 2026</a:t>
+            </a:r>
+          </a:p>
+        </p:txBody>
+      </p:sp>
     </p:spTree>
   </p:cSld>
   <p:clrMapOvr>
@@ -5974,6 +6581,34 @@
           </a:p>
         </p:txBody>
       </p:sp>
+      <p:sp>
+        <p:nvSpPr>
+          <p:cNvPr id="4" name="Footer Placeholder 3">
+            <a:extLst>
+              <a:ext uri="{FF2B5EF4-FFF2-40B4-BE49-F238E27FC236}">
+                <a16:creationId xmlns:a16="http://schemas.microsoft.com/office/drawing/2014/main" id="{69CE21AC-7688-BDFC-4F64-0B63FE3C12E7}"/>
+              </a:ext>
+            </a:extLst>
+          </p:cNvPr>
+          <p:cNvSpPr>
+            <a:spLocks noGrp="1"/>
+          </p:cNvSpPr>
+          <p:nvPr>
+            <p:ph type="ftr" sz="quarter" idx="11"/>
+          </p:nvPr>
+        </p:nvSpPr>
+        <p:spPr/>
+        <p:txBody>
+          <a:bodyPr/>
+          <a:lstStyle/>
+          <a:p>
+            <a:r>
+              <a:rPr lang="en-US"/>
+              <a:t>Copyright Peterson &amp; Davie, 2026</a:t>
+            </a:r>
+          </a:p>
+        </p:txBody>
+      </p:sp>
     </p:spTree>
   </p:cSld>
   <p:clrMapOvr>
@@ -6162,6 +6797,34 @@
           </a:p>
         </p:txBody>
       </p:sp>
+      <p:sp>
+        <p:nvSpPr>
+          <p:cNvPr id="4" name="Footer Placeholder 3">
+            <a:extLst>
+              <a:ext uri="{FF2B5EF4-FFF2-40B4-BE49-F238E27FC236}">
+                <a16:creationId xmlns:a16="http://schemas.microsoft.com/office/drawing/2014/main" id="{D984F349-CB04-2D9A-D1DF-EBF63F38F08C}"/>
+              </a:ext>
+            </a:extLst>
+          </p:cNvPr>
+          <p:cNvSpPr>
+            <a:spLocks noGrp="1"/>
+          </p:cNvSpPr>
+          <p:nvPr>
+            <p:ph type="ftr" sz="quarter" idx="11"/>
+          </p:nvPr>
+        </p:nvSpPr>
+        <p:spPr/>
+        <p:txBody>
+          <a:bodyPr/>
+          <a:lstStyle/>
+          <a:p>
+            <a:r>
+              <a:rPr lang="en-US"/>
+              <a:t>Copyright Peterson &amp; Davie, 2026</a:t>
+            </a:r>
+          </a:p>
+        </p:txBody>
+      </p:sp>
     </p:spTree>
   </p:cSld>
   <p:clrMapOvr>
@@ -6305,6 +6968,34 @@
           </a:p>
         </p:txBody>
       </p:sp>
+      <p:sp>
+        <p:nvSpPr>
+          <p:cNvPr id="4" name="Footer Placeholder 3">
+            <a:extLst>
+              <a:ext uri="{FF2B5EF4-FFF2-40B4-BE49-F238E27FC236}">
+                <a16:creationId xmlns:a16="http://schemas.microsoft.com/office/drawing/2014/main" id="{22B41860-4B43-D4B0-78D8-56E0C39DB258}"/>
+              </a:ext>
+            </a:extLst>
+          </p:cNvPr>
+          <p:cNvSpPr>
+            <a:spLocks noGrp="1"/>
+          </p:cNvSpPr>
+          <p:nvPr>
+            <p:ph type="ftr" sz="quarter" idx="11"/>
+          </p:nvPr>
+        </p:nvSpPr>
+        <p:spPr/>
+        <p:txBody>
+          <a:bodyPr/>
+          <a:lstStyle/>
+          <a:p>
+            <a:r>
+              <a:rPr lang="en-US"/>
+              <a:t>Copyright Peterson &amp; Davie, 2026</a:t>
+            </a:r>
+          </a:p>
+        </p:txBody>
+      </p:sp>
     </p:spTree>
   </p:cSld>
   <p:clrMapOvr>
@@ -6351,6 +7042,34 @@
           </a:p>
         </p:txBody>
       </p:sp>
+      <p:sp>
+        <p:nvSpPr>
+          <p:cNvPr id="3" name="Footer Placeholder 2">
+            <a:extLst>
+              <a:ext uri="{FF2B5EF4-FFF2-40B4-BE49-F238E27FC236}">
+                <a16:creationId xmlns:a16="http://schemas.microsoft.com/office/drawing/2014/main" id="{ECF5D500-26DE-4DCF-1F8D-51C96F1E1908}"/>
+              </a:ext>
+            </a:extLst>
+          </p:cNvPr>
+          <p:cNvSpPr>
+            <a:spLocks noGrp="1"/>
+          </p:cNvSpPr>
+          <p:nvPr>
+            <p:ph type="ftr" sz="quarter" idx="11"/>
+          </p:nvPr>
+        </p:nvSpPr>
+        <p:spPr/>
+        <p:txBody>
+          <a:bodyPr/>
+          <a:lstStyle/>
+          <a:p>
+            <a:r>
+              <a:rPr lang="en-US"/>
+              <a:t>Copyright Peterson &amp; Davie, 2026</a:t>
+            </a:r>
+          </a:p>
+        </p:txBody>
+      </p:sp>
     </p:spTree>
   </p:cSld>
   <p:clrMapOvr>
@@ -6540,6 +7259,34 @@
               <a:t>Wi-Fi and 5G now adopt the same underlying multiplexing algorithm</a:t>
             </a:r>
             <a:endParaRPr dirty="0"/>
+          </a:p>
+        </p:txBody>
+      </p:sp>
+      <p:sp>
+        <p:nvSpPr>
+          <p:cNvPr id="4" name="Footer Placeholder 3">
+            <a:extLst>
+              <a:ext uri="{FF2B5EF4-FFF2-40B4-BE49-F238E27FC236}">
+                <a16:creationId xmlns:a16="http://schemas.microsoft.com/office/drawing/2014/main" id="{E7E7C58D-A562-5C5B-A951-B8B93479C3C8}"/>
+              </a:ext>
+            </a:extLst>
+          </p:cNvPr>
+          <p:cNvSpPr>
+            <a:spLocks noGrp="1"/>
+          </p:cNvSpPr>
+          <p:nvPr>
+            <p:ph type="ftr" sz="quarter" idx="11"/>
+          </p:nvPr>
+        </p:nvSpPr>
+        <p:spPr/>
+        <p:txBody>
+          <a:bodyPr/>
+          <a:lstStyle/>
+          <a:p>
+            <a:r>
+              <a:rPr lang="en-US"/>
+              <a:t>Copyright Peterson &amp; Davie, 2026</a:t>
+            </a:r>
           </a:p>
         </p:txBody>
       </p:sp>
@@ -6765,6 +7512,34 @@
           </a:prstGeom>
         </p:spPr>
       </p:pic>
+      <p:sp>
+        <p:nvSpPr>
+          <p:cNvPr id="6" name="Footer Placeholder 5">
+            <a:extLst>
+              <a:ext uri="{FF2B5EF4-FFF2-40B4-BE49-F238E27FC236}">
+                <a16:creationId xmlns:a16="http://schemas.microsoft.com/office/drawing/2014/main" id="{E7882FCD-5333-1CD4-3FA4-60F11A245EE4}"/>
+              </a:ext>
+            </a:extLst>
+          </p:cNvPr>
+          <p:cNvSpPr>
+            <a:spLocks noGrp="1"/>
+          </p:cNvSpPr>
+          <p:nvPr>
+            <p:ph type="ftr" sz="quarter" idx="11"/>
+          </p:nvPr>
+        </p:nvSpPr>
+        <p:spPr/>
+        <p:txBody>
+          <a:bodyPr/>
+          <a:lstStyle/>
+          <a:p>
+            <a:r>
+              <a:rPr lang="en-US"/>
+              <a:t>Copyright Peterson &amp; Davie, 2026</a:t>
+            </a:r>
+          </a:p>
+        </p:txBody>
+      </p:sp>
     </p:spTree>
   </p:cSld>
   <p:clrMapOvr>
@@ -6928,6 +7703,34 @@
           </a:p>
         </p:txBody>
       </p:sp>
+      <p:sp>
+        <p:nvSpPr>
+          <p:cNvPr id="4" name="Footer Placeholder 3">
+            <a:extLst>
+              <a:ext uri="{FF2B5EF4-FFF2-40B4-BE49-F238E27FC236}">
+                <a16:creationId xmlns:a16="http://schemas.microsoft.com/office/drawing/2014/main" id="{96256AAD-A656-225E-9474-3C61D98BD2E3}"/>
+              </a:ext>
+            </a:extLst>
+          </p:cNvPr>
+          <p:cNvSpPr>
+            <a:spLocks noGrp="1"/>
+          </p:cNvSpPr>
+          <p:nvPr>
+            <p:ph type="ftr" sz="quarter" idx="11"/>
+          </p:nvPr>
+        </p:nvSpPr>
+        <p:spPr/>
+        <p:txBody>
+          <a:bodyPr/>
+          <a:lstStyle/>
+          <a:p>
+            <a:r>
+              <a:rPr lang="en-US"/>
+              <a:t>Copyright Peterson &amp; Davie, 2026</a:t>
+            </a:r>
+          </a:p>
+        </p:txBody>
+      </p:sp>
     </p:spTree>
   </p:cSld>
   <p:clrMapOvr>
@@ -7141,6 +7944,34 @@
           </a:prstGeom>
         </p:spPr>
       </p:pic>
+      <p:sp>
+        <p:nvSpPr>
+          <p:cNvPr id="5" name="Footer Placeholder 4">
+            <a:extLst>
+              <a:ext uri="{FF2B5EF4-FFF2-40B4-BE49-F238E27FC236}">
+                <a16:creationId xmlns:a16="http://schemas.microsoft.com/office/drawing/2014/main" id="{9A89060B-9F6C-87C8-F85F-9A9ECE608A3D}"/>
+              </a:ext>
+            </a:extLst>
+          </p:cNvPr>
+          <p:cNvSpPr>
+            <a:spLocks noGrp="1"/>
+          </p:cNvSpPr>
+          <p:nvPr>
+            <p:ph type="ftr" sz="quarter" idx="11"/>
+          </p:nvPr>
+        </p:nvSpPr>
+        <p:spPr/>
+        <p:txBody>
+          <a:bodyPr/>
+          <a:lstStyle/>
+          <a:p>
+            <a:r>
+              <a:rPr lang="en-US"/>
+              <a:t>Copyright Peterson &amp; Davie, 2026</a:t>
+            </a:r>
+          </a:p>
+        </p:txBody>
+      </p:sp>
     </p:spTree>
   </p:cSld>
   <p:clrMapOvr>
